--- a/public/fun/pack/pptx/reviewpro/보장점검양식프리미엄_40_사업장점검_모노블랙.pptx
+++ b/public/fun/pack/pptx/reviewpro/보장점검양식프리미엄_40_사업장점검_모노블랙.pptx
@@ -112,12 +112,12 @@
   <p:extLst>
     <p:ext uri="{521415D9-36F7-43E2-AB2F-B90AF26B5E84}">
       <p14:sectionLst xmlns:p14="http://schemas.microsoft.com/office/powerpoint/2010/main">
-        <p14:section name="시작" id="{904EFD42-14D4-4C8A-AF9E-F6E0764150D7}">
+        <p14:section name="시작" id="{2C924E67-9E0B-4463-9520-25D6869037BB}">
           <p14:sldIdLst>
             <p14:sldId id="256"/>
           </p14:sldIdLst>
         </p14:section>
-        <p14:section name="본문" id="{172BCC44-5E23-4517-B497-1E54781E6E0F}">
+        <p14:section name="본문" id="{1650A452-9EC6-478E-9FE8-27EA4B138343}">
           <p14:sldIdLst>
             <p14:sldId id="257"/>
             <p14:sldId id="258"/>
@@ -1585,7 +1585,7 @@
             </a:lvl1pPr>
           </a:lstStyle>
           <a:p>
-            <a:fld id="{C99FEE4F-D00A-4C8F-A3FE-733518DAE1F9}" type="slidenum">
+            <a:fld id="{379749A1-C953-4905-A919-B0E44192159F}" type="slidenum">
               <a:rPr lang="en-US"/>
               <a:t>‹#›</a:t>
             </a:fld>
@@ -2284,7 +2284,7 @@
             </a:lvl1pPr>
           </a:lstStyle>
           <a:p>
-            <a:fld id="{C20455CE-1A66-4A9C-9AE1-F6676710B913}" type="slidenum">
+            <a:fld id="{0E3E7240-4326-4283-A14D-F5C699BF5EA7}" type="slidenum">
               <a:rPr lang="en-US"/>
               <a:t>‹#›</a:t>
             </a:fld>
@@ -2962,7 +2962,7 @@
             </a:lvl1pPr>
           </a:lstStyle>
           <a:p>
-            <a:fld id="{210E365D-57FF-41C0-9A1D-EC78646A2915}" type="slidenum">
+            <a:fld id="{4AB68536-A248-4328-BCE6-B2392061F047}" type="slidenum">
               <a:rPr lang="en-US"/>
               <a:t>‹#›</a:t>
             </a:fld>
@@ -3825,7 +3825,7 @@
           <a:p>
             <a:r>
               <a:rPr lang="ko-KR"/>
-              <a:t>결산 전에 한 번 확인합니다</a:t>
+              <a:t>마감 전에 한 번 확인합니다</a:t>
             </a:r>
           </a:p>
         </p:txBody>
@@ -3847,7 +3847,7 @@
           <a:p>
             <a:r>
               <a:rPr lang="ko-KR"/>
-              <a:t>사업장 점검 · 0000. 00. 00</a:t>
+              <a:t>사업장 점검 · 날짜 입력</a:t>
             </a:r>
           </a:p>
           <a:p>
@@ -3938,7 +3938,7 @@
           <a:bodyPr/>
           <a:lstStyle/>
           <a:p>
-            <a:fld id="{A6524133-C7D5-43A4-96CF-6841436E7FE0}" type="slidenum">
+            <a:fld id="{16B27F9F-108B-4A3C-8C70-F95544A9549E}" type="slidenum">
               <a:rPr lang="en-US"/>
               <a:t>‹#›</a:t>
             </a:fld>
@@ -4454,7 +4454,7 @@
           <a:bodyPr/>
           <a:lstStyle/>
           <a:p>
-            <a:fld id="{9C6EA790-7C97-43FB-8B98-A1EDFBCC11CD}" type="slidenum">
+            <a:fld id="{1385B595-5D2C-4BAC-B1ED-3ED4873F05D3}" type="slidenum">
               <a:rPr lang="en-US"/>
               <a:t>‹#›</a:t>
             </a:fld>
@@ -5960,7 +5960,7 @@
           <a:bodyPr/>
           <a:lstStyle/>
           <a:p>
-            <a:fld id="{CB7078B6-8ADD-479D-84E3-69A5F463ACA4}" type="slidenum">
+            <a:fld id="{8FD64626-19E7-42E7-9497-CA6D4BF2204E}" type="slidenum">
               <a:rPr lang="en-US"/>
               <a:t>‹#›</a:t>
             </a:fld>
@@ -7510,7 +7510,7 @@
           <a:bodyPr/>
           <a:lstStyle/>
           <a:p>
-            <a:fld id="{2C934F2C-81C3-429F-B3FA-4D12A56FD08E}" type="slidenum">
+            <a:fld id="{3CF8BAA4-EBB8-4896-9371-5121D02E3FAD}" type="slidenum">
               <a:rPr lang="en-US"/>
               <a:t>‹#›</a:t>
             </a:fld>
@@ -8456,7 +8456,7 @@
           <a:bodyPr/>
           <a:lstStyle/>
           <a:p>
-            <a:fld id="{F738022B-FF57-4515-8EF2-AEE8CC73CF04}" type="slidenum">
+            <a:fld id="{E8762E5F-7418-41B9-870E-963A0BE11A9E}" type="slidenum">
               <a:rPr lang="en-US"/>
               <a:t>‹#›</a:t>
             </a:fld>
